--- a/deliverables/中期答辩.pptx
+++ b/deliverables/中期答辩.pptx
@@ -528,7 +528,7 @@
           <a:p>
             <a:r>
               <a:rPr lang="en-US" dirty="0"/>
-              <a:t>开场：这个项目的一句话是——巡航时低成本扫一遍，发现可疑目标就停车、对准、变焦、再看一眼。这一步把表盘从 50 像素放大到 150 像素，读数才够得着 0.5 % FS 的精度要求。这是我们和「拍一路视频回去慢慢看」的根本区别。硬件还没到，但整套系统现在就能在笔记本上跑起来，所有指标都是实测的。</a:t>
+              <a:t>开场：本系统的做法是，巡航时以低算力扫描一遍，检出可疑目标后停车、对准、变焦、重新拍摄。这一步把表盘成像从 50 像素放大到 150 像素，读数精度才能达到 0.5 % FS 的要求。与「沿途录像、回去离线分析」的区别就在这里。硬件尚未到位，但整套系统可以在笔记本上完整运行，所有指标均为实测值。</a:t>
             </a:r>
             <a:endParaRPr lang="en-US" dirty="0"/>
           </a:p>
@@ -616,7 +616,7 @@
           <a:p>
             <a:r>
               <a:rPr lang="en-US" dirty="0"/>
-              <a:t>这一页是识别部分的总纲。评审很可能问「为什么不用一个端到端大模型」——答案在最后那段：四个问题对速度、精度、输出形式、损失函数的要求互相冲突。而且这个拆法是 ICD 协议里本来就留好的位置，我们没有改接口。</a:t>
+              <a:t>本页是识别部分的总述。评审可能会问为什么不用一个端到端的大模型，答案在最后一段：四个子问题对速度、精度、输出形式和损失函数的要求互相冲突。而且这个划分是 ICD 协议中已经预留的，我们没有改动接口。</a:t>
             </a:r>
             <a:endParaRPr lang="en-US" dirty="0"/>
           </a:p>
@@ -704,7 +704,7 @@
           <a:p>
             <a:r>
               <a:rPr lang="en-US" dirty="0"/>
-              <a:t>仲裁层是纯规则不是学习的，这是有意的——它必须能逐条讲清凭什么。三条教训里第一条最值得讲：举证责任的方向是产品决策，不是技术决策。</a:t>
+              <a:t>仲裁层采用显式规则而非学习模型，是因为它必须能逐条给出判定依据。三条经验中第一条值得展开：举证责任的默认方向属于运维策略问题，不是算法问题。</a:t>
             </a:r>
             <a:endParaRPr lang="en-US" dirty="0"/>
           </a:p>
@@ -792,7 +792,7 @@
           <a:p>
             <a:r>
               <a:rPr lang="en-US" dirty="0"/>
-              <a:t>甲的巡航级模型已经训完，指标很高。但要主动说明一件事：epoch 1 就有 0.976，这个数偏高，我们已经写了 --check-leak 命令去排查 Roboflow 增广副本跨 train/val 的问题，明天出结果。主动说比被问出来好。</a:t>
+              <a:t>甲的巡航级模型已训练完成，指标较高。有一点要主动说明：第 1 轮 mAP50 就达到 0.976，这个数偏高。我们已经实现了 --check-leak 命令，用于排查 Roboflow 导出的增广副本跨训练集与验证集分布的情况，明天出结果。主动说明比被问到再解释更好。</a:t>
             </a:r>
             <a:endParaRPr lang="en-US" dirty="0"/>
           </a:p>
@@ -880,7 +880,7 @@
           <a:p>
             <a:r>
               <a:rPr lang="en-US" dirty="0"/>
-              <a:t>这一页明天上午替换。如果答辩前甲还没补上，就照现在这样讲——诚实说明哪些还没测，比编一个数字好。</a:t>
+              <a:t>本页明天上午替换。如果答辩前甲仍未补齐，就按现在的内容讲，说明哪些项目尚未测试即可，不要临时填一个数字。</a:t>
             </a:r>
             <a:endParaRPr lang="en-US" dirty="0"/>
           </a:p>
@@ -968,7 +968,7 @@
           <a:p>
             <a:r>
               <a:rPr lang="en-US" dirty="0"/>
-              <a:t>乙这一路最有价值的不是 0.778 这个数，是 0.251→0.384 这一步——同一个模型只加真实数据就涨 53%，说明瓶颈在数据不在模型。另外他修的那两个 bug 值得提一句：那是只有真正下载并跑通才会暴露的问题。</a:t>
+              <a:t>乙这一路值得讲的不是 0.778，而是 0.251 到 0.384 这一步：模型不变，仅增加真实标注就提高 53 %，说明瓶颈在数据而不在模型容量。他修的两个缺陷也值得提一句，那是只有真正下载数据并完整跑通流程才会暴露的问题。</a:t>
             </a:r>
             <a:endParaRPr lang="en-US" dirty="0"/>
           </a:p>
@@ -1056,7 +1056,7 @@
           <a:p>
             <a:r>
               <a:rPr lang="en-US" dirty="0"/>
-              <a:t>这一页讲的是方法论：有些东西数字上看不出来，只能人眼核对。类别映射错一位，IoU 照样能训得很好看，但模型学的是错的东西。所以我们把「人眼看叠加图」写成了硬性验收标准。</a:t>
+              <a:t>本页讲的是核对方法：有些错误不会反映在指标上，只能人工检查。类别映射错一位，IoU 仍然可以训得很高，但模型学到的对应关系是错的。因此我们把人工检查叠加图写成了硬性验收标准。</a:t>
             </a:r>
             <a:endParaRPr lang="en-US" dirty="0"/>
           </a:p>
@@ -1144,7 +1144,7 @@
           <a:p>
             <a:r>
               <a:rPr lang="en-US" dirty="0"/>
-              <a:t>这一页其实是全场最能体现我们方法论水平的一页。我们没有把一张好看的图直接放上去，而是自己算了采样噪声，发现差异全在噪声里。这种自查比结论本身更值钱。评审如果问「你们怎么知道这个差异是真的」，这就是答案。</a:t>
+              <a:t>本页讲的是自查过程。我们没有直接采用第一版图，而是先估计了采样噪声，结果发现待比较的差异小于噪声。如果评审问怎么确认这个差异是真实的，这一页就是回答。</a:t>
             </a:r>
             <a:endParaRPr lang="en-US" dirty="0"/>
           </a:p>
@@ -1232,7 +1232,7 @@
           <a:p>
             <a:r>
               <a:rPr lang="en-US" dirty="0"/>
-              <a:t>丙这一路是三条里做得最完整的。四个方案在同一批样本、同一个阈值下比，结论清楚。要强调 EfficientAD 那一列——它失败了，我们照实写进表里而不是删掉，这是诚实比选。</a:t>
+              <a:t>丙这一路完成度最高。四个方案在同一批样本、同一阈值下比较，结论明确。要强调 EfficientAD 这一列：该方案失败了，我们照实写进表里而不是删除，这是完整的比选记录。</a:t>
             </a:r>
             <a:endParaRPr lang="en-US" dirty="0"/>
           </a:p>
@@ -1320,7 +1320,7 @@
           <a:p>
             <a:r>
               <a:rPr lang="en-US" dirty="0"/>
-              <a:t>左图是最好讲的一张——两簇分开就是好，重叠就是不好，不需要懂算法也看得懂。右图 ROC 证明结论不依赖阈值选择。</a:t>
+              <a:t>左图最直观：两组分布分离即为可用，重叠即为不可用，不需要了解算法细节也能判断。右图 ROC 说明结论不依赖阈值的选取。</a:t>
             </a:r>
             <a:endParaRPr lang="en-US" dirty="0"/>
           </a:p>
@@ -1408,7 +1408,7 @@
           <a:p>
             <a:r>
               <a:rPr lang="en-US" dirty="0"/>
-              <a:t>第一条是全项目最好的一个 debug 故事：离线数据集和运行时管道的分布不一致，导致离线好看上线全错。这种问题只有真正把模型接进系统跑才会发现，纯做数据集是碰不到的。</a:t>
+              <a:t>第一条值得展开：离线数据集的分布与运行时管道实际送入的数据分布不一致，导致离线指标正常而接入系统后全部误报。这类问题只有把模型真正接进系统运行才会暴露，只在数据集上训练和评测是发现不了的。</a:t>
             </a:r>
             <a:endParaRPr lang="en-US" dirty="0"/>
           </a:p>
@@ -1584,7 +1584,7 @@
           <a:p>
             <a:r>
               <a:rPr lang="en-US" dirty="0"/>
-              <a:t>这一页收口识别部分。最后那段是升华：三条路需要的数据完全不同，这就是分开做的实证依据，不是拍脑袋。</a:t>
+              <a:t>本页收束识别部分。最后一段是结论：三条路线所需的数据类型完全不同，这是分开做的实证依据。</a:t>
             </a:r>
             <a:endParaRPr lang="en-US" dirty="0"/>
           </a:p>
@@ -1672,7 +1672,7 @@
           <a:p>
             <a:r>
               <a:rPr lang="en-US" dirty="0"/>
-              <a:t>三条演示都可以当场跑，加起来不到一分钟。如果评审对安全设计有疑问，直接演示第二条——杀掉 AI 进程，车照样走完路线，这个最有冲击力。</a:t>
+              <a:t>三条演示都可以当场执行，合计不到一分钟。如果评审对安全设计有疑问，建议直接演示第二条：终止感知与任务进程后车辆仍按路线走完。</a:t>
             </a:r>
             <a:endParaRPr lang="en-US" dirty="0"/>
           </a:p>
@@ -1760,7 +1760,7 @@
           <a:p>
             <a:r>
               <a:rPr lang="en-US" dirty="0"/>
-              <a:t>课题名叫「测控系统」，「控」那一半的证据全在这一页。绿线那个大过冲最直观——关掉增益调度就是这个样子。这三组数是这次现场跑出来的，不是抄旧文档。</a:t>
+              <a:t>课题名称是「测控系统」，控制部分的实测依据集中在这一页。绿色曲线的过冲最直观，那是关闭增益调度后的响应。三组数据均为本次现场运行所得，不是引用旧文档。</a:t>
             </a:r>
             <a:endParaRPr lang="en-US" dirty="0"/>
           </a:p>
@@ -1848,7 +1848,7 @@
           <a:p>
             <a:r>
               <a:rPr lang="en-US" dirty="0"/>
-              <a:t>这一页要主动讲成功率没达标。83.3% 和 75%，都低于 85% 目标。原因已经定位——证据包配对偶发丢 before 记录。我们把它写进待办而不是调参数凑过去。评审会欣赏这个态度，而且比被问出来好得多。</a:t>
+              <a:t>本页要主动说明成功率未达标。83.3 % 与 75.0 % 均低于 85 % 的目标。原因已定位为证据包配对偶发丢失 before 记录，已列入待办，没有通过调整判定条件规避。主动说明比被问到再解释更好。</a:t>
             </a:r>
             <a:endParaRPr lang="en-US" dirty="0"/>
           </a:p>
@@ -1936,7 +1936,7 @@
           <a:p>
             <a:r>
               <a:rPr lang="en-US" dirty="0"/>
-              <a:t>这一页是全场最能体现方法论水平的地方。三个人各自独立撞上同一个坑：测试集太容易，导致比选结论其实是数据定的。这种跨路线的共性发现，比任何单个指标都更能说明我们真的在做研究而不是调参。</a:t>
+              <a:t>本页是三条路线的共性发现：评测集难度不足时，比选结论实际由数据决定而非由方法决定。三个人各自独立遇到了这个问题，因此把它作为下一阶段对比实验的前置检查项。</a:t>
             </a:r>
             <a:endParaRPr lang="en-US" dirty="0"/>
           </a:p>
@@ -2024,7 +2024,7 @@
           <a:p>
             <a:r>
               <a:rPr lang="en-US" dirty="0"/>
-              <a:t>这一页要坦然讲。六项风险里我们主动列了两个已定位未修复的缺陷。这种坦白反而会让评审觉得数据可信——因为一个全是好消息的报告本身就可疑。</a:t>
+              <a:t>本页照实讲。六项风险中我们主动列出了两个已定位但尚未修复的缺陷。完整披露有助于说明其余数据的可信度。</a:t>
             </a:r>
             <a:endParaRPr lang="en-US" dirty="0"/>
           </a:p>
@@ -2112,7 +2112,7 @@
           <a:p>
             <a:r>
               <a:rPr lang="en-US" dirty="0"/>
-              <a:t>下一阶段四条线并行。丙那条已经基本完成，转入部署验证；组长这条主要是修缺陷和补可靠性曲线。</a:t>
+              <a:t>下一阶段四条线并行。丙这一路主体已完成，转入部署验证；组长这一路主要是修复缺陷和补充可靠性曲线。</a:t>
             </a:r>
             <a:endParaRPr lang="en-US" dirty="0"/>
           </a:p>
@@ -2200,7 +2200,7 @@
           <a:p>
             <a:r>
               <a:rPr lang="en-US" dirty="0"/>
-              <a:t>结束页。如果还有时间，主动提出演示——五条里挑一条，看门狗接管那条最有冲击力。</a:t>
+              <a:t>结束页。如果时间允许，主动提出现场演示，从五条中选一条，建议选看门狗接管那条。</a:t>
             </a:r>
             <a:endParaRPr lang="en-US" dirty="0"/>
           </a:p>
@@ -2288,7 +2288,7 @@
           <a:p>
             <a:r>
               <a:rPr lang="en-US" dirty="0"/>
-              <a:t>三项要求互相打架是这一页的核心。评审如果问「为什么不直接用更大的模型」——答案是模型再大也解决不了 50 像素上没有信息这件事。信息在光学环节就丢了，只能靠变焦补回来。</a:t>
+              <a:t>本页要讲清三项要求之间的冲突。如果评审问为什么不直接换更大的模型，答案是：50 像素的成像里本来就没有足够信息，信息在光学环节已经丢失，只能通过变焦重新采集。</a:t>
             </a:r>
             <a:endParaRPr lang="en-US" dirty="0"/>
           </a:p>
@@ -2376,7 +2376,7 @@
           <a:p>
             <a:r>
               <a:rPr lang="en-US" dirty="0"/>
-              <a:t>这张图是整个项目最该记住的一幕。左边巡航态 50 像素，指针根本读不出来；右边 3 倍变焦后 150 像素，刻度清清楚楚。关键是：实测框宽和针孔投影公式算出来的值吻合到 0.4 %，说明我们的虚拟场景不是画着好看，它在光学上是自洽的——所以在它上面测出来的精度指标是有意义的。</a:t>
+              <a:t>左侧巡航态 50 像素，指针无法分辨；右侧 3 倍变焦后 150 像素，刻度可读。要强调的是实测框宽与针孔投影公式的计算值相差 0.4 %，说明虚拟场景在光学上与公式自洽，因此在其上测得的精度指标可以作为依据。</a:t>
             </a:r>
             <a:endParaRPr lang="en-US" dirty="0"/>
           </a:p>
@@ -2464,7 +2464,7 @@
           <a:p>
             <a:r>
               <a:rPr lang="en-US" dirty="0"/>
-              <a:t>十个状态里这里画了八个主线状态，另外两个是 ABORT 和 ERROR。设计上有一条硬纪律：没有一个状态的出边是空的，每个状态都有超时去处，所以状态机不会卡死。复核预算那个公式很重要——它保证「主动式」不会把巡检时间拖爆。</a:t>
+              <a:t>十个状态中这里画出八个主线状态，另外两个是 ABORT 和 ERROR。设计上有一条约束：每个状态都必须定义超时转移，因此状态机不会停在某个状态上不动。复核预算公式的作用是限制单轮巡检中复核的总次数，使主动复核不会超出 30 min 的巡检时间预算。</a:t>
             </a:r>
             <a:endParaRPr lang="en-US" dirty="0"/>
           </a:p>
@@ -2552,7 +2552,7 @@
           <a:p>
             <a:r>
               <a:rPr lang="en-US" dirty="0"/>
-              <a:t>这一页回答「为什么这么复杂」。四个进程的边界是按安全职责切的，不是按代码量切的。五份 Schema 是冻结的契约，改一个字段都要走白名单流程，这样四个人可以并行改而不互相踩。</a:t>
+              <a:t>本页回答架构复杂度的问题。四个进程的边界按安全职责划分，不按代码量划分。五份 Schema 是冻结的接口契约，修改任何一个字段都要走 ALLOWED_DRIFT 白名单流程，因此四个人可以并行修改各自的模块而不产生接口冲突。</a:t>
             </a:r>
             <a:endParaRPr lang="en-US" dirty="0"/>
           </a:p>
@@ -2640,7 +2640,7 @@
           <a:p>
             <a:r>
               <a:rPr lang="en-US" dirty="0"/>
-              <a:t>这一页是回答「你们没硬件怎么做」的关键。要强调两点：一是桩会主动注入真机上的麻烦，所以在桩上跑通是有意义的验收；二是真值和先验严格分开，感知读不到真值，所以精度数字不是自己骗自己。假小车那条能证明我们的真机代码路径不是死代码。</a:t>
+              <a:t>本页回答没有硬件如何开展工作。有两点：一是桩会注入真机上实际存在的故障，因此在桩上通过的验收是有意义的；二是真值与先验严格分开，感知读不到真值，精度数据不是自我核对得出的。假小车这一条可以证明真机驱动代码路径处于可运行状态。</a:t>
             </a:r>
             <a:endParaRPr lang="en-US" dirty="0"/>
           </a:p>
@@ -2728,7 +2728,7 @@
           <a:p>
             <a:r>
               <a:rPr lang="en-US" dirty="0"/>
-              <a:t>这一页专门讲工作量。要强调的不是行数本身，而是结构——测试 5900 行几乎和核心业务代码一样多，说明质量不是最后补的。文档 4700 行意味着这套系统别人接得住。</a:t>
+              <a:t>本页讲工作量。重点不在总行数，而在构成：测试 5 900 行，与核心业务代码规模接近，说明测试与功能是同步写的，不是最后补的。文档 4 700 行，保证其他人接手时有依据可循。</a:t>
             </a:r>
             <a:endParaRPr lang="en-US" dirty="0"/>
           </a:p>
@@ -2816,7 +2816,7 @@
           <a:p>
             <a:r>
               <a:rPr lang="en-US" dirty="0"/>
-              <a:t>这一页讲我们怎么守质量。三道闸门都是命令行一条就能跑的，可以当场演示。最后那句纪律很重要——重复性超差我们主动写在 README 首页，这个态度本身就是答辩的加分项。</a:t>
+              <a:t>本页讲质量保障。三项检查各是一条命令，可以当场演示。最后一段是我们一直遵守的记录原则：重复性超差主动写在 README 首页，不做修饰。</a:t>
             </a:r>
             <a:endParaRPr lang="en-US" dirty="0"/>
           </a:p>
@@ -3941,7 +3941,7 @@
                 <a:ea typeface="Microsoft YaHei" pitchFamily="34" charset="-122"/>
                 <a:cs typeface="Microsoft YaHei" pitchFamily="34" charset="-120"/>
               </a:rPr>
-              <a:t>「这块表有没有问题」听上去是一个问题，做起来是四个，而且它们要的东西互相打架</a:t>
+              <a:t>「这块表有没有问题」看起来是一个问题，实际是四个，且四者对算力、精度与输出形式的要求互相冲突</a:t>
             </a:r>
             <a:endParaRPr lang="en-US" sz="1300" dirty="0"/>
           </a:p>
@@ -4462,7 +4462,7 @@
                           <a:ea typeface="Microsoft YaHei" pitchFamily="34" charset="-122"/>
                           <a:cs typeface="Microsoft YaHei" pitchFamily="34" charset="-120"/>
                         </a:rPr>
-                        <a:t>要快、要全图扫。巡航期 30 Hz 只跑得起它</a:t>
+                        <a:t>需要全图扫描且延迟低。巡航期 30 Hz 只能负担这一路</a:t>
                       </a:r>
                       <a:endParaRPr lang="en-US" sz="1150" dirty="0">
                         <a:latin typeface="Microsoft YaHei" charset="0"/>
@@ -4724,7 +4724,7 @@
                           <a:ea typeface="Microsoft YaHei" pitchFamily="34" charset="-122"/>
                           <a:cs typeface="Microsoft YaHei" pitchFamily="34" charset="-120"/>
                         </a:rPr>
-                        <a:t>要像素级精度。只在放大后的小 ROI 上跑得起</a:t>
+                        <a:t>需要像素级精度，只能在放大后的小 ROI 上运行</a:t>
                       </a:r>
                       <a:endParaRPr lang="en-US" sz="1150" dirty="0">
                         <a:latin typeface="Microsoft YaHei" charset="0"/>
@@ -5248,7 +5248,7 @@
                           <a:ea typeface="Microsoft YaHei" pitchFamily="34" charset="-122"/>
                           <a:cs typeface="Microsoft YaHei" pitchFamily="34" charset="-120"/>
                         </a:rPr>
-                        <a:t>有监督模型对未知类别系统性沉默——不是识别错，是压根不吭声</a:t>
+                        <a:t>有监督模型对训练集之外的类别不会输出，属于系统性漏检而非误判</a:t>
                       </a:r>
                       <a:endParaRPr lang="en-US" sz="1150" dirty="0">
                         <a:latin typeface="Microsoft YaHei" charset="0"/>
@@ -5380,7 +5380,7 @@
                           <a:ea typeface="Microsoft YaHei" pitchFamily="34" charset="-122"/>
                           <a:cs typeface="Microsoft YaHei" pitchFamily="34" charset="-120"/>
                         </a:rPr>
-                        <a:t>四路证据打架时怎么办</a:t>
+                        <a:t>四路证据互相矛盾时如何取舍</a:t>
                       </a:r>
                       <a:endParaRPr lang="en-US" sz="1150" dirty="0">
                         <a:latin typeface="Microsoft YaHei" charset="0"/>
@@ -5510,7 +5510,7 @@
                           <a:ea typeface="Microsoft YaHei" pitchFamily="34" charset="-122"/>
                           <a:cs typeface="Microsoft YaHei" pitchFamily="34" charset="-120"/>
                         </a:rPr>
-                        <a:t>必须能逐条讲清「凭什么」，评审第一个问题就是这个</a:t>
+                        <a:t>必须能逐条给出判定依据，这是评审首先会问的</a:t>
                       </a:r>
                       <a:endParaRPr lang="en-US" sz="1150" dirty="0">
                         <a:latin typeface="Microsoft YaHei" charset="0"/>
@@ -5623,7 +5623,7 @@
                 <a:ea typeface="Microsoft YaHei" pitchFamily="34" charset="-122"/>
                 <a:cs typeface="Microsoft YaHei" pitchFamily="34" charset="-120"/>
               </a:rPr>
-              <a:t>一个模型全干的代价不是「精度差一点」，是每一路都被别的路拖到跑不动或学不会</a:t>
+              <a:t>用单一模型承担全部任务，代价不是精度略有下降，而是每一路都会被其余几路的约束限制到无法运行或无法收敛</a:t>
             </a:r>
             <a:endParaRPr lang="en-US" sz="1450" dirty="0"/>
           </a:p>
@@ -5665,7 +5665,7 @@
                 <a:ea typeface="Microsoft YaHei" pitchFamily="34" charset="-122"/>
                 <a:cs typeface="Microsoft YaHei" pitchFamily="34" charset="-120"/>
               </a:rPr>
-              <a:t>要 30 Hz 就不能像素级，要像素级就不能全图扫，要认字就得换一套输出头，要认没见过的就不能用有监督的损失函数。</a:t>
+              <a:t>要保持 30 Hz 就无法做像素级分割；要做像素级分割就无法全图扫描；要识别字符就要换一套输出头；要识别训练集之外的异常就不能用有监督的损失函数。</a:t>
             </a:r>
             <a:endParaRPr lang="en-US" sz="1150" dirty="0"/>
           </a:p>
@@ -5685,7 +5685,7 @@
                 <a:ea typeface="Microsoft YaHei" pitchFamily="34" charset="-122"/>
                 <a:cs typeface="Microsoft YaHei" pitchFamily="34" charset="-120"/>
               </a:rPr>
-              <a:t>这个拆法不是新加的概念——ICD 的 trigger_rule 枚举里 L1/L2/L3 三级判据阶梯本来就写在协议里，verdict.result 的六个取值也正是一个仲裁层该有的六种结论。我们只是把协议里画好的格子填满，没有改任何 Schema。</a:t>
+              <a:t>这个划分不是我们新加的：ICD 的 trigger_rule 枚举中已经写明 L1、L2、L3 三级判据，verdict.result 的六个取值也对应仲裁层的六种结论。我们只是把协议里已经预留的位置填上，没有修改任何 Schema。</a:t>
             </a:r>
             <a:endParaRPr lang="en-US" sz="1150" dirty="0"/>
           </a:p>
@@ -5930,7 +5930,7 @@
                 <a:ea typeface="Microsoft YaHei" pitchFamily="34" charset="-122"/>
                 <a:cs typeface="Microsoft YaHei" pitchFamily="34" charset="-120"/>
               </a:rPr>
-              <a:t>纯规则、每条结论带 reasons——评审能顺着理由链问到底</a:t>
+              <a:t>全部为显式规则，每条结论附带 reasons 字段，判定依据可以逐级追溯</a:t>
             </a:r>
             <a:endParaRPr lang="en-US" sz="1300" dirty="0"/>
           </a:p>
@@ -6882,7 +6882,7 @@
                 <a:ea typeface="Microsoft YaHei" pitchFamily="34" charset="-122"/>
                 <a:cs typeface="Microsoft YaHei" pitchFamily="34" charset="-120"/>
               </a:rPr>
-              <a:t>「证据不足」默认判正常还是判可疑，是个产品决策不是技术决策。全判可疑会把人淹死，全判正常会漏掉真问题——所以要分情况显式写死。</a:t>
+              <a:t>「证据不足」默认判为正常还是可疑，属于运维策略问题，不是算法问题。全部判为可疑会产生大量无效工单，全部判为正常会漏掉真实缺陷，因此按触发条件分情况显式规定。</a:t>
             </a:r>
             <a:endParaRPr lang="en-US" sz="1100" dirty="0"/>
           </a:p>
@@ -7054,7 +7054,7 @@
                 <a:ea typeface="Microsoft YaHei" pitchFamily="34" charset="-122"/>
                 <a:cs typeface="Microsoft YaHei" pitchFamily="34" charset="-120"/>
               </a:rPr>
-              <a:t>四路都没说话 ≠ 四路说了但互相矛盾。前者要补观测，后者要交人复核。混成一类，运维就不知道该干什么。</a:t>
+              <a:t>四路都没有输出，与四路都有输出但结论矛盾，是两种情况。前者应补充观测，后者应转人工复核。合并为一类，运维就无法判断下一步该做什么。</a:t>
             </a:r>
             <a:endParaRPr lang="en-US" sz="1100" dirty="0"/>
           </a:p>
@@ -7226,7 +7226,7 @@
                 <a:ea typeface="Microsoft YaHei" pitchFamily="34" charset="-122"/>
                 <a:cs typeface="Microsoft YaHei" pitchFamily="34" charset="-120"/>
               </a:rPr>
-              <a:t>fusion.py 的门槛是 120 × 0.8 = 96 px。观测条件不够时宁可报 INCONCLUSIVE，也不出一个看起来精确的假读数。</a:t>
+              <a:t>fusion.py 的门槛是 120 × 0.8 = 96 px。观测条件不满足时输出 INCONCLUSIVE，而不给出一个数值精确但实际不可信的读数。</a:t>
             </a:r>
             <a:endParaRPr lang="en-US" sz="1100" dirty="0"/>
           </a:p>
@@ -7471,7 +7471,7 @@
                 <a:ea typeface="Microsoft YaHei" pitchFamily="34" charset="-122"/>
                 <a:cs typeface="Microsoft YaHei" pitchFamily="34" charset="-120"/>
               </a:rPr>
-              <a:t>公开数据集 distribution_room（2 773 张，CC BY 4.0）· yolo11s · 120 轮</a:t>
+              <a:t>训练集 distribution_room（公开数据集，2 773 张，CC BY 4.0），骨干 yolo11s，训练 120 轮</a:t>
             </a:r>
             <a:endParaRPr lang="en-US" sz="1300" dirty="0"/>
           </a:p>
@@ -8216,7 +8216,7 @@
                 <a:ea typeface="Microsoft YaHei" pitchFamily="34" charset="-122"/>
                 <a:cs typeface="Microsoft YaHei" pitchFamily="34" charset="-120"/>
               </a:rPr>
-              <a:t>epoch 1 就有 mAP50 0.9759</a:t>
+              <a:t>第 1 轮 mAP50 已达 0.9759</a:t>
             </a:r>
             <a:endParaRPr lang="en-US" sz="1000" dirty="0"/>
           </a:p>
@@ -8236,7 +8236,27 @@
                 <a:ea typeface="Microsoft YaHei" pitchFamily="34" charset="-122"/>
                 <a:cs typeface="Microsoft YaHei" pitchFamily="34" charset="-120"/>
               </a:rPr>
-              <a:t>→ 需先排除 train/val 增广副本串台</a:t>
+              <a:t>需先排除训练集与验证集之间</a:t>
+            </a:r>
+            <a:endParaRPr lang="en-US" sz="1000" dirty="0"/>
+          </a:p>
+          <a:p>
+            <a:pPr indent="0" marL="0">
+              <a:lnSpc>
+                <a:spcPts val="1400"/>
+              </a:lnSpc>
+              <a:buNone/>
+            </a:pPr>
+            <a:r>
+              <a:rPr lang="en-US" sz="1000" b="1" dirty="0">
+                <a:solidFill>
+                  <a:srgbClr val="8A5A05"/>
+                </a:solidFill>
+                <a:latin typeface="Microsoft YaHei" pitchFamily="34" charset="0"/>
+                <a:ea typeface="Microsoft YaHei" pitchFamily="34" charset="-122"/>
+                <a:cs typeface="Microsoft YaHei" pitchFamily="34" charset="-120"/>
+              </a:rPr>
+              <a:t>存在同源增广副本</a:t>
             </a:r>
             <a:endParaRPr lang="en-US" sz="1000" dirty="0"/>
           </a:p>
@@ -8481,7 +8501,7 @@
                 <a:ea typeface="Microsoft YaHei" pitchFamily="34" charset="-122"/>
                 <a:cs typeface="Microsoft YaHei" pitchFamily="34" charset="-120"/>
               </a:rPr>
-              <a:t>复核级模型与链路切换对比——明天上午补入</a:t>
+              <a:t>复核级模型与链路切换对比，明天上午补入</a:t>
             </a:r>
             <a:endParaRPr lang="en-US" sz="1300" dirty="0"/>
           </a:p>
@@ -9064,7 +9084,7 @@
                 <a:ea typeface="Microsoft YaHei" pitchFamily="34" charset="-122"/>
                 <a:cs typeface="Microsoft YaHei" pitchFamily="34" charset="-120"/>
               </a:rPr>
-              <a:t>     指标变化要区分「检测变差」与「距离改估计」</a:t>
+              <a:t>     指标变化要区分是检测精度下降，还是距离由真值改为估计值</a:t>
             </a:r>
             <a:endParaRPr lang="en-US" sz="1150" dirty="0"/>
           </a:p>
@@ -9172,7 +9192,7 @@
                 <a:ea typeface="Microsoft YaHei" pitchFamily="34" charset="-122"/>
                 <a:cs typeface="Microsoft YaHei" pitchFamily="34" charset="-120"/>
               </a:rPr>
-              <a:t>为什么切换对比比 mAP 更重要：它证明「代码先行、模型后训」这条路走通了——上层一行不改，只换配置就能把真权重接进全链路。</a:t>
+              <a:t>切换对比比 mAP 更重要，因为它验证的是「先写代码、后训模型」这条路径是否成立：上层代码不做任何修改，只改一项配置就能把训练好的权重接入全链路。</a:t>
             </a:r>
             <a:endParaRPr lang="en-US" sz="1200" dirty="0"/>
           </a:p>
@@ -9417,7 +9437,7 @@
                 <a:ea typeface="Microsoft YaHei" pitchFamily="34" charset="-122"/>
                 <a:cs typeface="Microsoft YaHei" pitchFamily="34" charset="-120"/>
               </a:rPr>
-              <a:t>针的分割 IoU——公开数据里只有 PaddleX 那一份给了像素级指针标注</a:t>
+              <a:t>指针类别的分割 IoU。公开数据集中只有 PaddleX 这一份提供了像素级指针标注</a:t>
             </a:r>
             <a:endParaRPr lang="en-US" sz="1300" dirty="0"/>
           </a:p>
@@ -9948,7 +9968,7 @@
                 <a:ea typeface="Microsoft YaHei" pitchFamily="34" charset="-122"/>
                 <a:cs typeface="Microsoft YaHei" pitchFamily="34" charset="-120"/>
               </a:rPr>
-              <a:t>最有价值的结论：卡住分割的是数据，不是模型容量</a:t>
+              <a:t>本路线的主要结论：限制分割精度的是训练数据，不是模型容量</a:t>
             </a:r>
             <a:endParaRPr lang="en-US" sz="1300" dirty="0"/>
           </a:p>
@@ -9990,7 +10010,7 @@
                 <a:ea typeface="Microsoft YaHei" pitchFamily="34" charset="-122"/>
                 <a:cs typeface="Microsoft YaHei" pitchFamily="34" charset="-120"/>
               </a:rPr>
-              <a:t>同一个 numpy 逻辑回归、同一套评测口径，只是把 PaddleX 的真实像素标注加进训练集，IoU 就从 0.251 涨到 0.384（+53 %）。这直接说明真实标注是瓶颈——也印证了「针 vs 刻度」这一环正是合成数据最教不会的地方。</a:t>
+              <a:t>模型与评测口径都不变，仅把 PaddleX 的真实像素标注加入训练集，指针 IoU 就从 0.251 升到 0.384，提高 53 %。这说明真实标注是当前的瓶颈，也验证了指针与刻度的区分正是合成掩膜最难提供监督信号的一环。</a:t>
             </a:r>
             <a:endParaRPr lang="en-US" sz="1100" dirty="0"/>
           </a:p>
@@ -10196,7 +10216,7 @@
                 <a:ea typeface="Microsoft YaHei" pitchFamily="34" charset="-122"/>
                 <a:cs typeface="Microsoft YaHei" pitchFamily="34" charset="-120"/>
               </a:rPr>
-              <a:t>乙 · L2：真实数据接对了没有，只能靠人眼看</a:t>
+              <a:t>乙 · L2：真实数据是否接入正确，只能通过人工检查叠加图确认</a:t>
             </a:r>
             <a:endParaRPr lang="en-US" sz="2700" dirty="0"/>
           </a:p>
@@ -10235,7 +10255,7 @@
                 <a:ea typeface="Microsoft YaHei" pitchFamily="34" charset="-122"/>
                 <a:cs typeface="Microsoft YaHei" pitchFamily="34" charset="-120"/>
               </a:rPr>
-              <a:t>掩膜错位在数字上完全看不出来——IoU 照样好看，但学的是错的东西</a:t>
+              <a:t>掩膜错位不会反映在指标上。IoU 仍然正常，但模型学到的是错误的类别对应关系</a:t>
             </a:r>
             <a:endParaRPr lang="en-US" sz="1300" dirty="0"/>
           </a:p>
@@ -10407,7 +10427,7 @@
                 <a:ea typeface="Microsoft YaHei" pitchFamily="34" charset="-122"/>
                 <a:cs typeface="Microsoft YaHei" pitchFamily="34" charset="-120"/>
               </a:rPr>
-              <a:t>→ PaddleX 的 background 大部分其实是盘面，分不开，映射成 255 忽略、不进损失</a:t>
+              <a:t>PaddleX 的 background 中大部分实际是盘面，两者无法区分，因此映射为 255 并排除出损失函数</a:t>
             </a:r>
             <a:endParaRPr lang="en-US" sz="1050" dirty="0"/>
           </a:p>
@@ -10515,7 +10535,7 @@
                 <a:ea typeface="Microsoft YaHei" pitchFamily="34" charset="-122"/>
                 <a:cs typeface="Microsoft YaHei" pitchFamily="34" charset="-120"/>
               </a:rPr>
-              <a:t>针与刻度的区分  →  从真实数据学（合成数据最教不会的一环）</a:t>
+              <a:t>指针与刻度的区分：由真实标注提供监督（合成掩膜在这一维上最弱）</a:t>
             </a:r>
             <a:endParaRPr lang="en-US" sz="1050" dirty="0"/>
           </a:p>
@@ -10535,7 +10555,7 @@
                 <a:ea typeface="Microsoft YaHei" pitchFamily="34" charset="-122"/>
                 <a:cs typeface="Microsoft YaHei" pitchFamily="34" charset="-120"/>
               </a:rPr>
-              <a:t>盘面与背景的区分  →  从合成数据学（合成标得毫无争议）</a:t>
+              <a:t>盘面与背景的区分：由合成掩膜提供监督（合成数据在这一维上标注明确）</a:t>
             </a:r>
             <a:endParaRPr lang="en-US" sz="1050" dirty="0"/>
           </a:p>
@@ -10574,7 +10594,7 @@
                 <a:ea typeface="Microsoft YaHei" pitchFamily="34" charset="-122"/>
                 <a:cs typeface="Microsoft YaHei" pitchFamily="34" charset="-120"/>
               </a:rPr>
-              <a:t>验收标准原文：「人眼看 check/ 里的叠加图确认掩膜没错位」——类别映射错一位，后面所有 IoU 都是错的且不报错</a:t>
+              <a:t>验收标准原文：人眼查看 check/ 目录下的叠加图，确认掩膜没有错位。类别映射错一位，后续所有 IoU 都是错的，且不会报错</a:t>
             </a:r>
             <a:endParaRPr lang="en-US" sz="950" dirty="0"/>
           </a:p>
@@ -10780,7 +10800,7 @@
                 <a:ea typeface="Microsoft YaHei" pitchFamily="34" charset="-122"/>
                 <a:cs typeface="Microsoft YaHei" pitchFamily="34" charset="-120"/>
               </a:rPr>
-              <a:t>核心图正在重画——现有版本的采样量不足以支撑结论</a:t>
+              <a:t>核心图正在重画，现有版本的采样量不足以支撑结论</a:t>
             </a:r>
             <a:endParaRPr lang="en-US" sz="1300" dirty="0"/>
           </a:p>
@@ -10892,7 +10912,7 @@
                 <a:ea typeface="Microsoft YaHei" pitchFamily="34" charset="-122"/>
                 <a:cs typeface="Microsoft YaHei" pitchFamily="34" charset="-120"/>
               </a:rPr>
-              <a:t>级联单次耗时 ≈ 59 ms，占 VERIFY 预算 2 500 ms 的 2.4 %——预算内</a:t>
+              <a:t>级联单次耗时约 59 ms，占 VERIFY 预算 2 500 ms 的 2.4 %，在预算内</a:t>
             </a:r>
             <a:endParaRPr lang="en-US" sz="1100" dirty="0"/>
           </a:p>
@@ -10940,7 +10960,7 @@
                 <a:ea typeface="Microsoft YaHei" pitchFamily="34" charset="-122"/>
                 <a:cs typeface="Microsoft YaHei" pitchFamily="34" charset="-120"/>
               </a:rPr>
-              <a:t>读数误差两者同量级（0.06–0.19 % FS），均远优于 0.5 % FS 限值</a:t>
+              <a:t>两者读数误差同量级（0.06 至 0.19 % FS），均优于 0.5 % FS 的限值</a:t>
             </a:r>
             <a:endParaRPr lang="en-US" sz="1100" dirty="0"/>
           </a:p>
@@ -11140,7 +11160,7 @@
                 <a:ea typeface="Microsoft YaHei" pitchFamily="34" charset="-122"/>
                 <a:cs typeface="Microsoft YaHei" pitchFamily="34" charset="-120"/>
               </a:rPr>
-              <a:t>纵轴改画 P90（中位数在这里会掩盖尾部风险）</a:t>
+              <a:t>纵轴改用 P90，中位数在这里会掩盖尾部误差</a:t>
             </a:r>
             <a:endParaRPr lang="en-US" sz="1150" dirty="0"/>
           </a:p>
@@ -11245,7 +11265,7 @@
                 <a:ea typeface="Microsoft YaHei" pitchFamily="34" charset="-122"/>
                 <a:cs typeface="Microsoft YaHei" pitchFamily="34" charset="-120"/>
               </a:rPr>
-              <a:t>为什么这张图要重画——这是本次自查最有价值的一个发现</a:t>
+              <a:t>这张图要重画的原因，也是本次自查的主要发现</a:t>
             </a:r>
             <a:endParaRPr lang="en-US" sz="1500" dirty="0"/>
           </a:p>
@@ -11343,7 +11363,7 @@
                 <a:ea typeface="Microsoft YaHei" pitchFamily="34" charset="-122"/>
                 <a:cs typeface="Microsoft YaHei" pitchFamily="34" charset="-120"/>
               </a:rPr>
-              <a:t>同一个方法、同一档像素密度，只换随机种子重跑 40 次，中位数在 0.053–0.228 % FS 之间跳。这个区间完整吞掉了几何法（0.06–0.14）与 U-Net（0.07–0.19）的全部差异——两者在 n=24 下无法区分。</a:t>
+              <a:t>同一方法、同一档像素密度，仅更换随机种子重跑 40 次，中位数在 0.053 至 0.228 % FS 之间波动。这个区间覆盖了几何法（0.06 至 0.14）与 U-Net（0.07 至 0.19）的全部差异，因此在 n=24 下两者无法区分。</a:t>
             </a:r>
             <a:endParaRPr lang="en-US" sz="1050" dirty="0"/>
           </a:p>
@@ -11441,7 +11461,7 @@
                 <a:ea typeface="Microsoft YaHei" pitchFamily="34" charset="-122"/>
                 <a:cs typeface="Microsoft YaHei" pitchFamily="34" charset="-120"/>
               </a:rPr>
-              <a:t>把采样量提到 200 后中位数几乎不动，动的是尾部：P90 随密度单调下降 0.415 → 0.178 % FS。像素密度买到的是「不出大错」，不是「典型误差更小」——改画 P90 反而正好支持我们的立论。</a:t>
+              <a:t>采样量提高到 200 后中位数基本不变，变化的是尾部：P90 随像素密度单调下降，由 0.415 降到 0.178 % FS。像素密度改善的是大误差的发生概率，不是典型误差，因此改用 P90 反而更支持本项目的论点。</a:t>
             </a:r>
             <a:endParaRPr lang="en-US" sz="1050" dirty="0"/>
           </a:p>
@@ -11539,7 +11559,7 @@
                 <a:ea typeface="Microsoft YaHei" pitchFamily="34" charset="-122"/>
                 <a:cs typeface="Microsoft YaHei" pitchFamily="34" charset="-120"/>
               </a:rPr>
-              <a:t>合成表盘的指针是死黑线画在近白盘面上，几何法「针是最暗贯穿条」的假设按构造成立且处在最大对比度。分割要修的失效在这个测试集上根本没出现——所以结论只能说「在合成表盘上无法区分」，不能外推到真实表计。</a:t>
+              <a:t>合成表盘的指针是近黑色线段绘制在近白盘面上，几何法「指针是盘面上最暗的贯穿条」这一假设按构造成立，且处于最大对比度。分割方法要解决的失效模式在这个测试集上没有出现，因此结论只能限定为「在合成表盘上无法区分」，不能外推到真实表计。</a:t>
             </a:r>
             <a:endParaRPr lang="en-US" sz="1050" dirty="0"/>
           </a:p>
@@ -11578,7 +11598,7 @@
                 <a:ea typeface="Microsoft YaHei" pitchFamily="34" charset="-122"/>
                 <a:cs typeface="Microsoft YaHei" pitchFamily="34" charset="-120"/>
               </a:rPr>
-              <a:t>结论措辞：「在合成表盘上三者不可区分」，而非「几何法更优」——比选待真实图误差表</a:t>
+              <a:t>结论措辞取「在合成表盘上三者不可区分」，而非「几何法更优」。最终比选需要真实表盘的误差表</a:t>
             </a:r>
             <a:endParaRPr lang="en-US" sz="950" dirty="0"/>
           </a:p>
@@ -11784,7 +11804,7 @@
                 <a:ea typeface="Microsoft YaHei" pitchFamily="34" charset="-122"/>
                 <a:cs typeface="Microsoft YaHei" pitchFamily="34" charset="-120"/>
               </a:rPr>
-              <a:t>非监督——只用「看起来正常」的样本，绕开缺陷数据不可得的约束</a:t>
+              <a:t>非监督方法，训练只使用正常样本，避开缺陷标注数据不可得的约束</a:t>
             </a:r>
             <a:endParaRPr lang="en-US" sz="1300" dirty="0"/>
           </a:p>
@@ -14479,7 +14499,7 @@
                 <a:ea typeface="Microsoft YaHei" pitchFamily="34" charset="-122"/>
                 <a:cs typeface="Microsoft YaHei" pitchFamily="34" charset="-120"/>
               </a:rPr>
-              <a:t>代价是权重从 1.6 KB 涨到 44 MB、打分从 6 ms 到 26 ms，且失去可解释性。部署目标是 RK3576 的 NPU，26 ms 在复核态预算内——这个取舍成立。</a:t>
+              <a:t>代价是权重从 1.6 KB 涨到 44 MB、打分从 6 ms 到 26 ms，且失去可解释性。部署目标是 RK3576 的 NPU，26 ms 在复核态预算内，因此这个取舍成立。</a:t>
             </a:r>
             <a:endParaRPr lang="en-US" sz="1050" dirty="0"/>
           </a:p>
@@ -14518,7 +14538,7 @@
                 <a:ea typeface="Microsoft YaHei" pitchFamily="34" charset="-122"/>
                 <a:cs typeface="Microsoft YaHei" pitchFamily="34" charset="-120"/>
               </a:rPr>
-              <a:t>EfficientAD 简化蒸馏实测分数倒挂（异常反而更低），未采用——原因与数据一并记录在案</a:t>
+              <a:t>EfficientAD 简化蒸馏实测出现分数倒挂，异常样本得分反而更低，未采用。原因与数据一并记录在案</a:t>
             </a:r>
             <a:endParaRPr lang="en-US" sz="950" dirty="0"/>
           </a:p>
@@ -14724,7 +14744,7 @@
                 <a:ea typeface="Microsoft YaHei" pitchFamily="34" charset="-122"/>
                 <a:cs typeface="Microsoft YaHei" pitchFamily="34" charset="-120"/>
               </a:rPr>
-              <a:t>两堆分数分不分得开，一眼就看得出来</a:t>
+              <a:t>正常与异常两组分数是否分离，可以直接从分布图判断</a:t>
             </a:r>
             <a:endParaRPr lang="en-US" sz="1300" dirty="0"/>
           </a:p>
@@ -14856,7 +14876,7 @@
                 <a:ea typeface="Microsoft YaHei" pitchFamily="34" charset="-122"/>
                 <a:cs typeface="Microsoft YaHei" pitchFamily="34" charset="-120"/>
               </a:rPr>
-              <a:t>阈值 0 → 1 全程扫描。全协方差 PaDiM 贴左上角，整条曲线站得住——说明它不是靠某一个阈值点凑出来的成绩。</a:t>
+              <a:t>阈值由 0 扫描到 1。全协方差 PaDiM 的曲线靠近左上角，整条曲线均可用，说明该结果不依赖于某一个特定阈值。</a:t>
             </a:r>
             <a:endParaRPr lang="en-US" sz="1050" dirty="0"/>
           </a:p>
@@ -15101,7 +15121,7 @@
                 <a:ea typeface="Microsoft YaHei" pitchFamily="34" charset="-122"/>
                 <a:cs typeface="Microsoft YaHei" pitchFamily="34" charset="-120"/>
               </a:rPr>
-              <a:t>比数字本身更值钱——它们解释了为什么第一版会失败</a:t>
+              <a:t>这两条解释了第一版为什么失败，比最终指标更有参考价值</a:t>
             </a:r>
             <a:endParaRPr lang="en-US" sz="1300" dirty="0"/>
           </a:p>
@@ -15290,7 +15310,7 @@
                 <a:ea typeface="Microsoft YaHei" pitchFamily="34" charset="-122"/>
                 <a:cs typeface="Microsoft YaHei" pitchFamily="34" charset="-120"/>
               </a:rPr>
-              <a:t>系统喂给 L3 的是检测框，而检测框是抖的，会把表盘「切边」。实测切边 12 % 的正常表盘，异常分从 0.5 直接跳到 1.0——全部误报。</a:t>
+              <a:t>系统送入 L3 的是检测框，而检测框存在抖动，会把表盘边缘裁掉。实测裁掉 12 % 的正常表盘，异常分由 0.5 升到 1.0，全部误报。</a:t>
             </a:r>
             <a:endParaRPr lang="en-US" sz="1100" dirty="0"/>
           </a:p>
@@ -15408,7 +15428,7 @@
                 <a:ea typeface="Microsoft YaHei" pitchFamily="34" charset="-122"/>
                 <a:cs typeface="Microsoft YaHei" pitchFamily="34" charset="-120"/>
               </a:rPr>
-              <a:t>离线数据集的分布必须和运行时管道真正喂进来的分布一致，否则离线指标再好，上线就崩。</a:t>
+              <a:t>离线数据集的分布必须与运行时管道实际送入的数据分布一致，否则离线指标再好，接入系统后也会失效。</a:t>
             </a:r>
             <a:endParaRPr lang="en-US" sz="1050" dirty="0"/>
           </a:p>
@@ -15656,7 +15676,7 @@
                 <a:ea typeface="Microsoft YaHei" pitchFamily="34" charset="-122"/>
                 <a:cs typeface="Microsoft YaHei" pitchFamily="34" charset="-120"/>
               </a:rPr>
-              <a:t>外观异常（FOREIGN_OBJECT 异物）才是 L3 该管的——两层各司其职，没有互相顶替。</a:t>
+              <a:t>外观异常（FOREIGN_OBJECT 异物）由 L3 负责。两层分工明确，没有互相覆盖。</a:t>
             </a:r>
             <a:endParaRPr lang="en-US" sz="1100" dirty="0"/>
           </a:p>
@@ -15754,7 +15774,7 @@
                 <a:ea typeface="Microsoft YaHei" pitchFamily="34" charset="-122"/>
                 <a:cs typeface="Microsoft YaHei" pitchFamily="34" charset="-120"/>
               </a:rPr>
-              <a:t>两条都写进了交付文档——「为什么第一版失败」比「最终版多好」更能说明我们真的跑通了</a:t>
+              <a:t>两条都已写入交付文档。第一版为什么失败，比最终版指标多高更能说明流程是真正跑通的</a:t>
             </a:r>
             <a:endParaRPr lang="en-US" sz="950" dirty="0"/>
           </a:p>
@@ -16104,7 +16124,7 @@
                 <a:ea typeface="Microsoft YaHei" pitchFamily="34" charset="-122"/>
                 <a:cs typeface="Microsoft YaHei" pitchFamily="34" charset="-120"/>
               </a:rPr>
-              <a:t>为什么必须「停车变焦再看一眼」；像素密度这条立论怎么来的</a:t>
+              <a:t>为什么必须停车变焦重拍，以及像素密度与读数精度的关系</a:t>
             </a:r>
             <a:endParaRPr lang="en-US" sz="1150" dirty="0"/>
           </a:p>
@@ -16287,7 +16307,7 @@
                 <a:ea typeface="Microsoft YaHei" pitchFamily="34" charset="-122"/>
                 <a:cs typeface="Microsoft YaHei" pitchFamily="34" charset="-120"/>
               </a:rPr>
-              <a:t>代码规模、接口冻结、501 项测试如何守住这套系统</a:t>
+              <a:t>代码规模、接口冻结机制，以及 501 项测试的覆盖范围</a:t>
             </a:r>
             <a:endParaRPr lang="en-US" sz="1150" dirty="0"/>
           </a:p>
@@ -16898,7 +16918,7 @@
                 <a:ea typeface="Microsoft YaHei" pitchFamily="34" charset="-122"/>
                 <a:cs typeface="Microsoft YaHei" pitchFamily="34" charset="-120"/>
               </a:rPr>
-              <a:t>每一条都给出了可测的数，也都写清了还没测的部分</a:t>
+              <a:t>每条路线都给出了实测数据，也写明了尚未测试的部分</a:t>
             </a:r>
             <a:endParaRPr lang="en-US" sz="1300" dirty="0"/>
           </a:p>
@@ -17488,7 +17508,7 @@
                           <a:ea typeface="Microsoft YaHei" pitchFamily="34" charset="-122"/>
                           <a:cs typeface="Microsoft YaHei" pitchFamily="34" charset="-120"/>
                         </a:rPr>
-                        <a:t>公开集训练可用，合成集仅做增广</a:t>
+                        <a:t>使用公开数据集训练，合成数据仅用于增广</a:t>
                       </a:r>
                       <a:endParaRPr lang="en-US" sz="1150" dirty="0">
                         <a:latin typeface="Microsoft YaHei" charset="0"/>
@@ -17815,7 +17835,7 @@
                           <a:ea typeface="Microsoft YaHei" pitchFamily="34" charset="-122"/>
                           <a:cs typeface="Microsoft YaHei" pitchFamily="34" charset="-120"/>
                         </a:rPr>
-                        <a:t>合成表盘上与几何法不可区分，保持几何法为默认</a:t>
+                        <a:t>在合成表盘上与几何法不可区分，仍以几何法为默认实现</a:t>
                       </a:r>
                       <a:endParaRPr lang="en-US" sz="1150" dirty="0">
                         <a:latin typeface="Microsoft YaHei" charset="0"/>
@@ -18142,7 +18162,7 @@
                           <a:ea typeface="Microsoft YaHei" pitchFamily="34" charset="-122"/>
                           <a:cs typeface="Microsoft YaHei" pitchFamily="34" charset="-120"/>
                         </a:rPr>
-                        <a:t>PaDiM 全协方差胜出，EfficientAD 倒挂未采用</a:t>
+                        <a:t>PaDiM 全协方差版本最优，EfficientAD 因分数倒挂未采用</a:t>
                       </a:r>
                       <a:endParaRPr lang="en-US" sz="1150" dirty="0">
                         <a:latin typeface="Microsoft YaHei" charset="0"/>
@@ -18362,7 +18382,7 @@
                 <a:ea typeface="Microsoft YaHei" pitchFamily="34" charset="-122"/>
                 <a:cs typeface="Microsoft YaHei" pitchFamily="34" charset="-120"/>
               </a:rPr>
-              <a:t>L1 靠公开数据训纹理多样性、L2 靠真实标注学「针 vs 刻度」、L3 靠合成正常样本绕开缺陷数据不可得——三条路各自需要的数据完全不同。这正是「四类模型分开做」而不是「训一个更大的模型」的实证依据。</a:t>
+              <a:t>L1 依靠公开数据集获得纹理多样性，L2 依靠真实标注学习指针与刻度的区分，L3 依靠合成正常样本避开缺陷数据不可得的约束。三条路线所需的数据类型完全不同，这是四类模型分开训练而不是合并为单一模型的实证依据。</a:t>
             </a:r>
             <a:endParaRPr lang="en-US" sz="1150" dirty="0"/>
           </a:p>
@@ -18607,7 +18627,7 @@
                 <a:ea typeface="Microsoft YaHei" pitchFamily="34" charset="-122"/>
                 <a:cs typeface="Microsoft YaHei" pitchFamily="34" charset="-120"/>
               </a:rPr>
-              <a:t>方案书说安全设计的说服力不在于声明，在于能当场演示</a:t>
+              <a:t>按方案书的要求，安全设计需要以可现场复现的方式验证，而不是仅在文档中声明</a:t>
             </a:r>
             <a:endParaRPr lang="en-US" sz="1300" dirty="0"/>
           </a:p>
@@ -18740,7 +18760,7 @@
                 <a:ea typeface="Microsoft YaHei" pitchFamily="34" charset="-122"/>
                 <a:cs typeface="Microsoft YaHei" pitchFamily="34" charset="-120"/>
               </a:rPr>
-              <a:t>五项校验逐条上报 PASS / FAIL / SKIP。参数范围硬编码在代码里，不放配置——配置能被改，边界不能。</a:t>
+              <a:t>五项校验逐条上报 PASS、FAIL 或 SKIP。参数范围硬编码在源码中，不放在配置文件里：配置可以被修改，安全边界不应该。</a:t>
             </a:r>
             <a:endParaRPr lang="en-US" sz="1050" dirty="0"/>
           </a:p>
@@ -18978,7 +18998,7 @@
                 <a:ea typeface="Microsoft YaHei" pitchFamily="34" charset="-122"/>
                 <a:cs typeface="Microsoft YaHei" pitchFamily="34" charset="-120"/>
               </a:rPr>
-              <a:t>AI 进程崩掉后，网关 1.5 s 内接管，下发 RESUME 让车自己走完路线。这正是四进程拆分的意义。</a:t>
+              <a:t>感知与任务进程异常退出后，网关在 1.5 s 内接管，下发 RESUME 使车辆按原路线走完。这是四进程划分要保证的能力。</a:t>
             </a:r>
             <a:endParaRPr lang="en-US" sz="1050" dirty="0"/>
           </a:p>
@@ -19083,7 +19103,7 @@
                 <a:ea typeface="Microsoft YaHei" pitchFamily="34" charset="-122"/>
                 <a:cs typeface="Microsoft YaHei" pitchFamily="34" charset="-120"/>
               </a:rPr>
-              <a:t>→ 杀掉 AI 进程后，车自己走完路线</a:t>
+              <a:t>→ 终止感知与任务进程后，车辆仍按路线走完</a:t>
             </a:r>
             <a:endParaRPr lang="en-US" sz="1050" dirty="0"/>
           </a:p>
@@ -19387,7 +19407,7 @@
                 <a:ea typeface="Microsoft YaHei" pitchFamily="34" charset="-122"/>
                 <a:cs typeface="Microsoft YaHei" pitchFamily="34" charset="-120"/>
               </a:rPr>
-              <a:t>所有指向底盘和云台的动作只有 gateway 一个出口——这是安全边界第一层的物理保证，不是约定</a:t>
+              <a:t>所有指向底盘与云台的动作只经过 gateway 一个出口。这是第一层安全边界在代码结构上的保证，不依赖各模块自觉遵守</a:t>
             </a:r>
             <a:endParaRPr lang="en-US" sz="1150" dirty="0"/>
           </a:p>
@@ -19593,7 +19613,7 @@
                 <a:ea typeface="Microsoft YaHei" pitchFamily="34" charset="-122"/>
                 <a:cs typeface="Microsoft YaHei" pitchFamily="34" charset="-120"/>
               </a:rPr>
-              <a:t>云台控制：变焦增益调度是必需的，不是优化</a:t>
+              <a:t>云台控制：变焦增益调度是功能必需项，不是性能优化项</a:t>
             </a:r>
             <a:endParaRPr lang="en-US" sz="2700" dirty="0"/>
           </a:p>
@@ -19632,7 +19652,7 @@
                 <a:ea typeface="Microsoft YaHei" pitchFamily="34" charset="-122"/>
                 <a:cs typeface="Microsoft YaHei" pitchFamily="34" charset="-120"/>
               </a:rPr>
-              <a:t>方案书 §11.1 点名的交付物——阶跃响应曲线（本次实测）</a:t>
+              <a:t>方案书 §11.1 列出的交付物：云台阶跃响应曲线，本页为本次实测结果</a:t>
             </a:r>
             <a:endParaRPr lang="en-US" sz="1300" dirty="0"/>
           </a:p>
@@ -20856,7 +20876,7 @@
                 <a:ea typeface="Microsoft YaHei" pitchFamily="34" charset="-122"/>
                 <a:cs typeface="Microsoft YaHei" pitchFamily="34" charset="-120"/>
               </a:rPr>
-              <a:t>同样一度的云台转角，在 3× 变焦下画面里移动的像素是 1× 的三倍。不按倍率缩放控制量，等于把增益直接放大三倍——必然过冲。</a:t>
+              <a:t>同样 1° 的云台转角，在 3× 变焦下对应的画面位移是 1× 的三倍。若控制量不按变焦倍率缩放，等效于把回路增益放大三倍，必然产生过冲。</a:t>
             </a:r>
             <a:endParaRPr lang="en-US" sz="1050" dirty="0"/>
           </a:p>
@@ -20993,7 +21013,7 @@
                 <a:ea typeface="Microsoft YaHei" pitchFamily="34" charset="-122"/>
                 <a:cs typeface="Microsoft YaHei" pitchFamily="34" charset="-120"/>
               </a:rPr>
-              <a:t>关掉调度后过冲近 40 %，图中绿线一眼可见——这条对比就是「控」这一半的核心证据。</a:t>
+              <a:t>关闭增益调度后过冲接近 40 %，对应图中绿色曲线。这组对比是本课题控制部分的主要实测依据。</a:t>
             </a:r>
             <a:endParaRPr lang="en-US" sz="1000" dirty="0"/>
           </a:p>
@@ -21238,7 +21258,7 @@
                 <a:ea typeface="Microsoft YaHei" pitchFamily="34" charset="-122"/>
                 <a:cs typeface="Microsoft YaHei" pitchFamily="34" charset="-120"/>
               </a:rPr>
-              <a:t>四个进程 + 云端台账全链路，300 秒一轮，跑完出小结</a:t>
+              <a:t>四个边缘进程与云端台账构成全链路，单轮 300 秒，结束后输出统计小结</a:t>
             </a:r>
             <a:endParaRPr lang="en-US" sz="1300" dirty="0"/>
           </a:p>
@@ -22001,7 +22021,7 @@
                 <a:ea typeface="Microsoft YaHei" pitchFamily="34" charset="-122"/>
                 <a:cs typeface="Microsoft YaHei" pitchFamily="34" charset="-120"/>
               </a:rPr>
-              <a:t>主因是偶发的证据包配对失败——before 记录为空导致密度比为 0，该包不计入成功。这是已定位、未修复的缺陷，写进了待办而不是调参数掩盖。</a:t>
+              <a:t>主要原因是证据包偶发配对失败：before 记录为空，导致密度比为 0，该包不计入成功。这是已定位但尚未修复的缺陷，已列入待办，没有通过调整判定条件规避。</a:t>
             </a:r>
             <a:endParaRPr lang="en-US" sz="1050" dirty="0"/>
           </a:p>
@@ -22914,7 +22934,7 @@
                 <a:ea typeface="Microsoft YaHei" pitchFamily="34" charset="-122"/>
                 <a:cs typeface="Microsoft YaHei" pitchFamily="34" charset="-120"/>
               </a:rPr>
-              <a:t>指标几乎打满，复核级「优于巡航级 5 个点」的验收标准已无余量</a:t>
+              <a:t>指标接近上限，复核级「mAP50 优于巡航级 5 个点」的验收标准已没有余量</a:t>
             </a:r>
             <a:endParaRPr lang="en-US" sz="1050" dirty="0"/>
           </a:p>
@@ -23064,7 +23084,7 @@
                 <a:ea typeface="Microsoft YaHei" pitchFamily="34" charset="-122"/>
                 <a:cs typeface="Microsoft YaHei" pitchFamily="34" charset="-120"/>
               </a:rPr>
-              <a:t>噪声区间吞掉了几何法与 U-Net 的全部差异，两者无法区分</a:t>
+              <a:t>噪声区间覆盖了几何法与 U-Net 的全部差异，两者无法区分</a:t>
             </a:r>
             <a:endParaRPr lang="en-US" sz="1050" dirty="0"/>
           </a:p>
@@ -23214,7 +23234,7 @@
                 <a:ea typeface="Microsoft YaHei" pitchFamily="34" charset="-122"/>
                 <a:cs typeface="Microsoft YaHei" pitchFamily="34" charset="-120"/>
               </a:rPr>
-              <a:t>换成更难的增广样本后才暴露出 90.8 % 漏报，比选这才有意义</a:t>
+              <a:t>改用难度更高的增广样本后才暴露出 90.8 % 的漏报，比选结果才具备区分度</a:t>
             </a:r>
             <a:endParaRPr lang="en-US" sz="1050" dirty="0"/>
           </a:p>
@@ -23256,7 +23276,7 @@
                 <a:ea typeface="Microsoft YaHei" pitchFamily="34" charset="-122"/>
                 <a:cs typeface="Microsoft YaHei" pitchFamily="34" charset="-120"/>
               </a:rPr>
-              <a:t>三条路线各自独立撞上同一件事——只有丙主动把样本做难，比选表才真正有信息量。这条经验已经写进三份交付文档，作为下一阶段所有对比实验的前置检查。</a:t>
+              <a:t>三条路线各自独立遇到了同一个问题。其中只有丙主动提高了评测样本的难度，比选表才具备区分度。这条经验已写入三份交付文档，作为下一阶段所有对比实验的前置检查项。</a:t>
             </a:r>
             <a:endParaRPr lang="en-US" sz="1250" dirty="0"/>
           </a:p>
@@ -23462,7 +23482,7 @@
                 <a:ea typeface="Microsoft YaHei" pitchFamily="34" charset="-122"/>
                 <a:cs typeface="Microsoft YaHei" pitchFamily="34" charset="-120"/>
               </a:rPr>
-              <a:t>如实列出——包含两项已定位但尚未修复的缺陷</a:t>
+              <a:t>如实列出，其中包含两项已定位但尚未修复的缺陷</a:t>
             </a:r>
             <a:endParaRPr lang="en-US" sz="1300" dirty="0"/>
           </a:p>
@@ -23983,7 +24003,7 @@
                           <a:ea typeface="Microsoft YaHei" pitchFamily="34" charset="-122"/>
                           <a:cs typeface="Microsoft YaHei" pitchFamily="34" charset="-120"/>
                         </a:rPr>
-                        <a:t>受检测框噪声支配，非算法极限；不调参掩盖，列入待办</a:t>
+                        <a:t>主要受检测框噪声影响，不是读数算法的精度上限。不通过调参掩盖，列入待办</a:t>
                       </a:r>
                       <a:endParaRPr lang="en-US" sz="1100" dirty="0">
                         <a:latin typeface="Microsoft YaHei" charset="0"/>
@@ -24704,7 +24724,7 @@
                           <a:ea typeface="Microsoft YaHei" pitchFamily="34" charset="-122"/>
                           <a:cs typeface="Microsoft YaHei" pitchFamily="34" charset="-120"/>
                         </a:rPr>
-                        <a:t>可能存在 train/val 增广副本串台</a:t>
+                        <a:t>训练集与验证集可能存在同源增广副本</a:t>
                       </a:r>
                       <a:endParaRPr lang="en-US" sz="1100" dirty="0">
                         <a:latin typeface="Microsoft YaHei" charset="0"/>
@@ -25409,7 +25429,7 @@
                 <a:ea typeface="Microsoft YaHei" pitchFamily="34" charset="-122"/>
                 <a:cs typeface="Microsoft YaHei" pitchFamily="34" charset="-120"/>
               </a:rPr>
-              <a:t>这一页刻意不做美化。项目从头到尾的原则是「证据不足时说不足，不猜」——重复性超差挂在 README 首页，端到端成功率如实报 75–83 %，EfficientAD 失败照样写进比选表。评审最容易问倒人的不是「你这个指标为什么低」，而是「你这个数是怎么来的」。</a:t>
+              <a:t>本页不做修饰。项目一贯的记录原则是：证据不足时写明不足，不做推测。重复性超差写在 README 首页，端到端成功率如实记为 75 % 至 83 %，EfficientAD 方案失败也照样写进比选表。指标偏低通常可以解释，指标来源不清则无法解释。</a:t>
             </a:r>
             <a:endParaRPr lang="en-US" sz="1150" dirty="0"/>
           </a:p>
@@ -25448,7 +25468,7 @@
                 <a:ea typeface="Microsoft YaHei" pitchFamily="34" charset="-122"/>
                 <a:cs typeface="Microsoft YaHei" pitchFamily="34" charset="-120"/>
               </a:rPr>
-              <a:t>六项风险中四项有明确处置路径，两项（真实读数真值、上板）受外部条件约束</a:t>
+              <a:t>六项风险中四项有明确处置路径，两项（真实表盘读数真值、上板实测）受外部条件限制</a:t>
             </a:r>
             <a:endParaRPr lang="en-US" sz="950" dirty="0"/>
           </a:p>
@@ -25654,7 +25674,7 @@
                 <a:ea typeface="Microsoft YaHei" pitchFamily="34" charset="-122"/>
                 <a:cs typeface="Microsoft YaHei" pitchFamily="34" charset="-120"/>
               </a:rPr>
-              <a:t>按接口边界切分，四条线可并行推进</a:t>
+              <a:t>按接口边界划分，四条线可并行推进</a:t>
             </a:r>
             <a:endParaRPr lang="en-US" sz="1300" dirty="0"/>
           </a:p>
@@ -25830,7 +25850,7 @@
                 <a:ea typeface="Microsoft YaHei" pitchFamily="34" charset="-122"/>
                 <a:cs typeface="Microsoft YaHei" pitchFamily="34" charset="-120"/>
               </a:rPr>
-              <a:t>跑 --check-leak 排除 train/val 串台</a:t>
+              <a:t>运行 --check-leak，排除训练集与验证集的同源样本</a:t>
             </a:r>
             <a:endParaRPr lang="en-US" sz="1050" dirty="0"/>
           </a:p>
@@ -26126,7 +26146,7 @@
                 <a:ea typeface="Microsoft YaHei" pitchFamily="34" charset="-122"/>
                 <a:cs typeface="Microsoft YaHei" pitchFamily="34" charset="-120"/>
               </a:rPr>
-              <a:t>重跑 make_figures 修正图例配色</a:t>
+              <a:t>重新运行 make_figures，修正图例配色</a:t>
             </a:r>
             <a:endParaRPr lang="en-US" sz="1050" dirty="0"/>
           </a:p>
@@ -26398,7 +26418,7 @@
                 <a:ea typeface="Microsoft YaHei" pitchFamily="34" charset="-122"/>
                 <a:cs typeface="Microsoft YaHei" pitchFamily="34" charset="-120"/>
               </a:rPr>
-              <a:t>已完成主体，转入部署验证</a:t>
+              <a:t>主体已完成，转入部署验证</a:t>
             </a:r>
             <a:endParaRPr lang="en-US" sz="1050" dirty="0"/>
           </a:p>
@@ -26574,7 +26594,7 @@
                 <a:ea typeface="Microsoft YaHei" pitchFamily="34" charset="-122"/>
                 <a:cs typeface="Microsoft YaHei" pitchFamily="34" charset="-120"/>
               </a:rPr>
-              <a:t>修复证据包配对丢 before 的缺陷</a:t>
+              <a:t>修复证据包配对丢失 before 记录的缺陷</a:t>
             </a:r>
             <a:endParaRPr lang="en-US" sz="1050" dirty="0"/>
           </a:p>
@@ -26685,7 +26705,7 @@
                 <a:ea typeface="Microsoft YaHei" pitchFamily="34" charset="-122"/>
                 <a:cs typeface="Microsoft YaHei" pitchFamily="34" charset="-120"/>
               </a:rPr>
-              <a:t>分工按接口边界切，不按文件数切——四个人可以并行改，不会互相踩</a:t>
+              <a:t>分工按接口边界划分，不按文件数量划分，四个人可以并行修改各自的模块而不产生冲突</a:t>
             </a:r>
             <a:endParaRPr lang="en-US" sz="950" dirty="0"/>
           </a:p>
@@ -27351,7 +27371,7 @@
                 <a:ea typeface="Microsoft YaHei" pitchFamily="34" charset="-122"/>
                 <a:cs typeface="Microsoft YaHei" pitchFamily="34" charset="-120"/>
               </a:rPr>
-              <a:t>5 m 处 1× 变焦，表盘只有 50 px——指针根本读不出来</a:t>
+              <a:t>5 m 处 1× 变焦时表盘成像只有 50 px，指针无法分辨</a:t>
             </a:r>
             <a:endParaRPr lang="en-US" sz="1150" dirty="0"/>
           </a:p>
@@ -27562,7 +27582,7 @@
                 <a:ea typeface="Microsoft YaHei" pitchFamily="34" charset="-122"/>
                 <a:cs typeface="Microsoft YaHei" pitchFamily="34" charset="-120"/>
               </a:rPr>
-              <a:t>要读得清就得靠近、放大、多拍，每一样都在花时间</a:t>
+              <a:t>靠近、放大、多次拍摄都会增加单个航点的停留时间</a:t>
             </a:r>
             <a:endParaRPr lang="en-US" sz="1150" dirty="0"/>
           </a:p>
@@ -27692,7 +27712,7 @@
                 <a:ea typeface="Microsoft YaHei" pitchFamily="34" charset="-122"/>
                 <a:cs typeface="Microsoft YaHei" pitchFamily="34" charset="-120"/>
               </a:rPr>
-              <a:t>不添乱</a:t>
+              <a:t>不误动作</a:t>
             </a:r>
             <a:endParaRPr lang="en-US" sz="1800" dirty="0"/>
           </a:p>
@@ -27773,7 +27793,7 @@
                 <a:ea typeface="Microsoft YaHei" pitchFamily="34" charset="-122"/>
                 <a:cs typeface="Microsoft YaHei" pitchFamily="34" charset="-120"/>
               </a:rPr>
-              <a:t>模型会错，而车是会动的——决策权不能交给模型</a:t>
+              <a:t>模型存在误判，而车辆在运动，停车决策不能由模型直接触发</a:t>
             </a:r>
             <a:endParaRPr lang="en-US" sz="1150" dirty="0"/>
           </a:p>
@@ -27839,7 +27859,7 @@
                 <a:ea typeface="Microsoft YaHei" pitchFamily="34" charset="-122"/>
                 <a:cs typeface="Microsoft YaHei" pitchFamily="34" charset="-120"/>
               </a:rPr>
-              <a:t>三项要求互相打架，这就是课题的真正难点</a:t>
+              <a:t>三项要求互相冲突，这是本课题的主要难点</a:t>
             </a:r>
             <a:endParaRPr lang="en-US" sz="1600" dirty="0"/>
           </a:p>
@@ -27881,7 +27901,7 @@
                 <a:ea typeface="Microsoft YaHei" pitchFamily="34" charset="-122"/>
                 <a:cs typeface="Microsoft YaHei" pitchFamily="34" charset="-120"/>
               </a:rPr>
-              <a:t>「全程慢慢拍」看得清但跑不完；「全程快速扫」跑得完但看不清。我们的解法是把两者分开——巡航期用小模型 30 Hz 低成本扫，只在发现可疑目标时才停车、对准、变焦、重拍。代价只花在真正需要的地方，而「要不要停车」这个决策由规则和安全网关把关，不交给模型。</a:t>
+              <a:t>全程低速高分辨率拍摄能满足精度但超出时间预算；全程高速扫描能满足时间但达不到精度。本方案把两者分开：巡航期用轻量检测模型以 30 Hz 扫描，只有检出可疑目标后才停车、对准、变焦、重新拍摄，时间开销只发生在需要复核的航点上。是否停车由状态机的抑制规则与安全网关判定，模型只提供候选，不直接控制执行器。</a:t>
             </a:r>
             <a:endParaRPr lang="en-US" sz="1250" dirty="0"/>
           </a:p>
@@ -28126,7 +28146,7 @@
                 <a:ea typeface="Microsoft YaHei" pitchFamily="34" charset="-122"/>
                 <a:cs typeface="Microsoft YaHei" pitchFamily="34" charset="-120"/>
               </a:rPr>
-              <a:t>全项目最直观的一幕——同一块压力表，变焦前后</a:t>
+              <a:t>同一块压力表在巡航态与复核态下的成像对比</a:t>
             </a:r>
             <a:endParaRPr lang="en-US" sz="1300" dirty="0"/>
           </a:p>
@@ -28718,7 +28738,7 @@
                 <a:ea typeface="Microsoft YaHei" pitchFamily="34" charset="-122"/>
                 <a:cs typeface="Microsoft YaHei" pitchFamily="34" charset="-120"/>
               </a:rPr>
-              <a:t>十状态机，每个状态都有超时去处——没有一条出边是空的</a:t>
+              <a:t>十状态机。每个状态都定义了超时转移，不存在没有出边的状态</a:t>
             </a:r>
             <a:endParaRPr lang="en-US" sz="1300" dirty="0"/>
           </a:p>
@@ -30901,7 +30921,7 @@
                 <a:ea typeface="Microsoft YaHei" pitchFamily="34" charset="-122"/>
                 <a:cs typeface="Microsoft YaHei" pitchFamily="34" charset="-120"/>
               </a:rPr>
-              <a:t>拆进程不是为了好看，是为了安全网关能在 AI 崩掉之后继续工作</a:t>
+              <a:t>进程边界按安全职责划分：安全网关必须在感知与任务进程异常退出后继续工作</a:t>
             </a:r>
             <a:endParaRPr lang="en-US" sz="1300" dirty="0"/>
           </a:p>
@@ -33292,7 +33312,7 @@
                 <a:ea typeface="Microsoft YaHei" pitchFamily="34" charset="-122"/>
                 <a:cs typeface="Microsoft YaHei" pitchFamily="34" charset="-120"/>
               </a:rPr>
-              <a:t>安全网关必须是唯一能碰执行器的地方，而且必须能在 AI 进程崩掉之后继续工作。同一个进程里做不到——一个段错误会把两边一起带走。</a:t>
+              <a:t>安全网关必须是执行器的唯一入口，并且要在感知或任务进程异常退出后继续工作。放在同一进程内无法做到：一次段错误会同时终止两侧。</a:t>
             </a:r>
             <a:endParaRPr lang="en-US" sz="1100" dirty="0"/>
           </a:p>
@@ -33321,7 +33341,7 @@
                 <a:ea typeface="Microsoft YaHei" pitchFamily="34" charset="-122"/>
                 <a:cs typeface="Microsoft YaHei" pitchFamily="34" charset="-120"/>
               </a:rPr>
-              <a:t>「杀掉 AI 进程后车自己走完路线」这条演示，验的就是这条边界。</a:t>
+              <a:t>「终止感知与任务进程后，车辆仍按路线走完」这条演示验证的就是这个边界。</a:t>
             </a:r>
             <a:endParaRPr lang="en-US" sz="1100" dirty="0"/>
           </a:p>
@@ -33566,7 +33586,7 @@
                 <a:ea typeface="Microsoft YaHei" pitchFamily="34" charset="-122"/>
                 <a:cs typeface="Microsoft YaHei" pitchFamily="34" charset="-120"/>
               </a:rPr>
-              <a:t>虚拟配电室按针孔投影渲染，所以测出来的是真数，不是推导值</a:t>
+              <a:t>虚拟配电室按针孔投影渲染，因此精度与控制指标是实测值而非推导值</a:t>
             </a:r>
             <a:endParaRPr lang="en-US" sz="1300" dirty="0"/>
           </a:p>
@@ -33632,7 +33652,7 @@
                 <a:ea typeface="Microsoft YaHei" pitchFamily="34" charset="-122"/>
                 <a:cs typeface="Microsoft YaHei" pitchFamily="34" charset="-120"/>
               </a:rPr>
-              <a:t>第三人称机位：车身 + 云台朝向 + 当前视锥。变焦 1×→3× 时视场角从 60.0° 收紧到 21.8°，并正好罩住被复核的表盘——「指令下去 → 云台转了 → 视场扫过目标」这条因果链第一次是可见的。</a:t>
+              <a:t>第三人称机位同时画出车身、云台朝向与当前视锥。变焦 1× 到 3× 时视场角由 60.0° 收窄到 21.8°，视锥落在被复核的表盘上。指令下发、云台转动、视场覆盖目标这一串过程因此可以直接观察，不必只看日志。</a:t>
             </a:r>
             <a:endParaRPr lang="en-US" sz="1100" dirty="0"/>
           </a:p>
@@ -33698,7 +33718,7 @@
                 <a:ea typeface="Microsoft YaHei" pitchFamily="34" charset="-122"/>
                 <a:cs typeface="Microsoft YaHei" pitchFamily="34" charset="-120"/>
               </a:rPr>
-              <a:t>桩不是占位符</a:t>
+              <a:t>桩不是空实现</a:t>
             </a:r>
             <a:endParaRPr lang="en-US" sz="1450" dirty="0"/>
           </a:p>
@@ -33740,7 +33760,7 @@
                 <a:ea typeface="Microsoft YaHei" pitchFamily="34" charset="-122"/>
                 <a:cs typeface="Microsoft YaHei" pitchFamily="34" charset="-120"/>
               </a:rPr>
-              <a:t>主动注入真机上会出现的麻烦：ACK 丢包 2 %、对焦失败 5 %、真实角速度约束、安全事件 0.05 次/分。赋值即到位的假驱动会让任何判据都显得正确。</a:t>
+              <a:t>桩会注入真机上实际存在的故障：ACK 丢包 2 %、对焦失败 5 %、云台角速度上限、安全事件 0.05 次/分。如果驱动只是把目标值直接赋给状态量，任何到位判据都会通过，验证就没有意义。</a:t>
             </a:r>
             <a:endParaRPr lang="en-US" sz="980" dirty="0"/>
           </a:p>
@@ -33848,7 +33868,7 @@
                 <a:ea typeface="Microsoft YaHei" pitchFamily="34" charset="-122"/>
                 <a:cs typeface="Microsoft YaHei" pitchFamily="34" charset="-120"/>
               </a:rPr>
-              <a:t>world.py 里 truth 只给渲染与打分，感知侧永远读不到——否则精度指标全是自己糊弄自己。这条是整个评测可信度的地基。</a:t>
+              <a:t>world.py 中的 truth 只提供给渲染器和评分逻辑，感知侧读不到。否则精度指标等于用真值去核对真值。这条约束是评测结果可信的前提。</a:t>
             </a:r>
             <a:endParaRPr lang="en-US" sz="980" dirty="0"/>
           </a:p>
@@ -34064,7 +34084,7 @@
                 <a:ea typeface="Microsoft YaHei" pitchFamily="34" charset="-122"/>
                 <a:cs typeface="Microsoft YaHei" pitchFamily="34" charset="-120"/>
               </a:rPr>
-              <a:t>fakecar 起独立进程，字节真的过内核（POSIX 走 PTY，Windows 走 TCP 环回）。分帧、CRC、超时、重传、2 % ACK 丢包注入全部照原样发生——证明协议栈与时序逻辑正确。</a:t>
+              <a:t>fakecar 以独立进程运行，字节经过内核（POSIX 用 PTY，Windows 用 TCP 环回）。分帧、CRC 校验、超时、重传与 2 % ACK 丢包注入均按原样发生，可以验证协议栈与时序逻辑的正确性。</a:t>
             </a:r>
             <a:endParaRPr lang="en-US" sz="1050" dirty="0"/>
           </a:p>
@@ -34309,7 +34329,7 @@
                 <a:ea typeface="Microsoft YaHei" pitchFamily="34" charset="-122"/>
                 <a:cs typeface="Microsoft YaHei" pitchFamily="34" charset="-120"/>
               </a:rPr>
-              <a:t>从零起步，四周内建成一套可运行、可测量、可演示的完整系统</a:t>
+              <a:t>四周内完成一套可运行、可测量、可现场演示的系统</a:t>
             </a:r>
             <a:endParaRPr lang="en-US" sz="1300" dirty="0"/>
           </a:p>
@@ -37927,7 +37947,7 @@
                 <a:ea typeface="Microsoft YaHei" pitchFamily="34" charset="-122"/>
                 <a:cs typeface="Microsoft YaHei" pitchFamily="34" charset="-120"/>
               </a:rPr>
-              <a:t>质量保障：怎么保证这套系统不是「看起来能跑」</a:t>
+              <a:t>质量保障：如何保证系统是真的可运行，而不是仅在设计上成立</a:t>
             </a:r>
             <a:endParaRPr lang="en-US" sz="2700" dirty="0"/>
           </a:p>
@@ -37966,7 +37986,7 @@
                 <a:ea typeface="Microsoft YaHei" pitchFamily="34" charset="-122"/>
                 <a:cs typeface="Microsoft YaHei" pitchFamily="34" charset="-120"/>
               </a:rPr>
-              <a:t>三道闸门，每次提交都要全过</a:t>
+              <a:t>三项检查，每次提交前全部执行</a:t>
             </a:r>
             <a:endParaRPr lang="en-US" sz="1300" dirty="0"/>
           </a:p>
@@ -38113,7 +38133,7 @@
                 <a:ea typeface="Microsoft YaHei" pitchFamily="34" charset="-122"/>
                 <a:cs typeface="Microsoft YaHei" pitchFamily="34" charset="-120"/>
               </a:rPr>
-              <a:t>Schema 与代码、网关硬编码常量与 Schema 范围逐条交叉比对。含 9 条反例——故意构造越界报文，必须全部被拦下。</a:t>
+              <a:t>Schema 与代码、网关硬编码常量与 Schema 范围逐条交叉比对。其中 9 条为反例，构造越界报文，必须全部被拦截。</a:t>
             </a:r>
             <a:endParaRPr lang="en-US" sz="1100" dirty="0"/>
           </a:p>
@@ -38539,7 +38559,7 @@
                 <a:ea typeface="Microsoft YaHei" pitchFamily="34" charset="-122"/>
                 <a:cs typeface="Microsoft YaHei" pitchFamily="34" charset="-120"/>
               </a:rPr>
-              <a:t>起全系统跑一轮真实巡检，产出证据包并统计复核增益。跑不出数就是没跑通——不接受「理论上可以」。</a:t>
+              <a:t>起全系统跑一轮真实巡检，产出证据包并统计复核增益。没有产出数据即视为未跑通，不接受仅在设计上成立的结论。</a:t>
             </a:r>
             <a:endParaRPr lang="en-US" sz="1100" dirty="0"/>
           </a:p>
@@ -38671,7 +38691,7 @@
                 <a:ea typeface="Microsoft YaHei" pitchFamily="34" charset="-122"/>
                 <a:cs typeface="Microsoft YaHei" pitchFamily="34" charset="-120"/>
               </a:rPr>
-              <a:t>一条贯穿全项目的纪律：测不到的写「未测」，测出来难看的如实写</a:t>
+              <a:t>一条贯穿全项目的记录原则：没有测到的写「未测」，测出来不理想的照实写</a:t>
             </a:r>
             <a:endParaRPr lang="en-US" sz="1450" dirty="0"/>
           </a:p>
@@ -38713,7 +38733,7 @@
                 <a:ea typeface="Microsoft YaHei" pitchFamily="34" charset="-122"/>
                 <a:cs typeface="Microsoft YaHei" pitchFamily="34" charset="-120"/>
               </a:rPr>
-              <a:t>举例：重复性指标 0.321 % FS 压线超差（限值 0.3），我们把它挂在 README 首页而不是调参数凑过去——那等于把误差藏起来。评审最容易问倒人的不是「你这个指标为什么低」，而是「你这个数是怎么来的」。</a:t>
+              <a:t>例如重复性 0.321 % FS 超出 0.3 % 的限值，我们把它写在 README 首页，而不是通过调整参数让它落进限值。后一种做法只是掩盖了误差来源。指标偏低通常可以解释，指标来源不清则无法解释。</a:t>
             </a:r>
             <a:endParaRPr lang="en-US" sz="1150" dirty="0"/>
           </a:p>
@@ -38752,7 +38772,7 @@
                 <a:ea typeface="Microsoft YaHei" pitchFamily="34" charset="-122"/>
                 <a:cs typeface="Microsoft YaHei" pitchFamily="34" charset="-120"/>
               </a:rPr>
-              <a:t>三道闸门在每次提交前全跑；validate 不过就不提交</a:t>
+              <a:t>三项检查在每次提交前全部执行；validate 不通过就不提交</a:t>
             </a:r>
             <a:endParaRPr lang="en-US" sz="950" dirty="0"/>
           </a:p>
